--- a/ADG/_실측판/07장/7장_RedoApply기동과동기화검증.pptx
+++ b/ADG/_실측판/07장/7장_RedoApply기동과동기화검증.pptx
@@ -5615,7 +5615,35 @@
                 </a:solidFill>
                 <a:latin typeface="맑은 고딕"/>
               </a:rPr>
-              <a:t>•  멈춰 있는데 CANCEL → **ORA-16136** `Managed Standby Recovery not active`</a:t>
+              <a:t>•  멈춰 있는데 CANCEL → </a:t>
+            </a:r>
+            <a:r>
+              <a:rPr sz="1700" b="1">
+                <a:solidFill>
+                  <a:srgbClr val="222222"/>
+                </a:solidFill>
+                <a:latin typeface="맑은 고딕"/>
+              </a:rPr>
+              <a:t>ORA-16136</a:t>
+            </a:r>
+            <a:r>
+              <a:rPr sz="1700" b="0">
+                <a:solidFill>
+                  <a:srgbClr val="222222"/>
+                </a:solidFill>
+                <a:latin typeface="맑은 고딕"/>
+              </a:rPr>
+              <a:t> </a:t>
+            </a:r>
+            <a:r>
+              <a:rPr sz="1700" b="0">
+                <a:solidFill>
+                  <a:srgbClr val="222222"/>
+                </a:solidFill>
+                <a:latin typeface="Consolas"/>
+                <a:cs typeface="Consolas"/>
+              </a:rPr>
+              <a:t>Managed Standby Recovery not active</a:t>
             </a:r>
           </a:p>
           <a:p>
@@ -5631,7 +5659,35 @@
                 </a:solidFill>
                 <a:latin typeface="맑은 고딕"/>
               </a:rPr>
-              <a:t>•  돌고 있는데 기동 → **ORA-01153** `an incompatible media recovery is active`</a:t>
+              <a:t>•  돌고 있는데 기동 → </a:t>
+            </a:r>
+            <a:r>
+              <a:rPr sz="1700" b="1">
+                <a:solidFill>
+                  <a:srgbClr val="222222"/>
+                </a:solidFill>
+                <a:latin typeface="맑은 고딕"/>
+              </a:rPr>
+              <a:t>ORA-01153</a:t>
+            </a:r>
+            <a:r>
+              <a:rPr sz="1700" b="0">
+                <a:solidFill>
+                  <a:srgbClr val="222222"/>
+                </a:solidFill>
+                <a:latin typeface="맑은 고딕"/>
+              </a:rPr>
+              <a:t> </a:t>
+            </a:r>
+            <a:r>
+              <a:rPr sz="1700" b="0">
+                <a:solidFill>
+                  <a:srgbClr val="222222"/>
+                </a:solidFill>
+                <a:latin typeface="Consolas"/>
+                <a:cs typeface="Consolas"/>
+              </a:rPr>
+              <a:t>an incompatible media recovery is active</a:t>
             </a:r>
           </a:p>
           <a:p>
@@ -5647,7 +5703,26 @@
                 </a:solidFill>
                 <a:latin typeface="맑은 고딕"/>
               </a:rPr>
-              <a:t>•  `USING CURRENT LOGFILE` 유무와 무관하게 같은 오류</a:t>
+              <a:t>•  </a:t>
+            </a:r>
+            <a:r>
+              <a:rPr sz="1700" b="0">
+                <a:solidFill>
+                  <a:srgbClr val="222222"/>
+                </a:solidFill>
+                <a:latin typeface="Consolas"/>
+                <a:cs typeface="Consolas"/>
+              </a:rPr>
+              <a:t>USING CURRENT LOGFILE</a:t>
+            </a:r>
+            <a:r>
+              <a:rPr sz="1700" b="0">
+                <a:solidFill>
+                  <a:srgbClr val="222222"/>
+                </a:solidFill>
+                <a:latin typeface="맑은 고딕"/>
+              </a:rPr>
+              <a:t> 유무와 무관하게 같은 오류</a:t>
             </a:r>
           </a:p>
           <a:p>
@@ -5663,7 +5738,16 @@
                 </a:solidFill>
                 <a:latin typeface="맑은 고딕"/>
               </a:rPr>
-              <a:t>•  둘 다 **상태를 바꾸지 않는다**</a:t>
+              <a:t>•  둘 다 </a:t>
+            </a:r>
+            <a:r>
+              <a:rPr sz="1700" b="1">
+                <a:solidFill>
+                  <a:srgbClr val="222222"/>
+                </a:solidFill>
+                <a:latin typeface="맑은 고딕"/>
+              </a:rPr>
+              <a:t>상태를 바꾸지 않는다</a:t>
             </a:r>
           </a:p>
         </p:txBody>
@@ -6324,7 +6408,17 @@
                 </a:solidFill>
                 <a:latin typeface="맑은 고딕"/>
               </a:rPr>
-              <a:t>•  `1 LOG_ARCHIVE_DEST_1  (빈칸)  BAD PARAM  IDLE`</a:t>
+              <a:t>•  </a:t>
+            </a:r>
+            <a:r>
+              <a:rPr sz="1700" b="0">
+                <a:solidFill>
+                  <a:srgbClr val="222222"/>
+                </a:solidFill>
+                <a:latin typeface="Consolas"/>
+                <a:cs typeface="Consolas"/>
+              </a:rPr>
+              <a:t>1 LOG_ARCHIVE_DEST_1  (빈칸)  BAD PARAM  IDLE</a:t>
             </a:r>
           </a:p>
           <a:p>
@@ -6340,7 +6434,27 @@
                 </a:solidFill>
                 <a:latin typeface="맑은 고딕"/>
               </a:rPr>
-              <a:t>•  파라미터 값 : `... db_unique_name=**chicago**`</a:t>
+              <a:t>•  파라미터 값 : </a:t>
+            </a:r>
+            <a:r>
+              <a:rPr sz="1700" b="0">
+                <a:solidFill>
+                  <a:srgbClr val="222222"/>
+                </a:solidFill>
+                <a:latin typeface="Consolas"/>
+                <a:cs typeface="Consolas"/>
+              </a:rPr>
+              <a:t>... db_unique_name=</a:t>
+            </a:r>
+            <a:r>
+              <a:rPr sz="1700" b="1">
+                <a:solidFill>
+                  <a:srgbClr val="222222"/>
+                </a:solidFill>
+                <a:latin typeface="Consolas"/>
+                <a:cs typeface="Consolas"/>
+              </a:rPr>
+              <a:t>chicago</a:t>
             </a:r>
           </a:p>
           <a:p>
@@ -6356,7 +6470,36 @@
                 </a:solidFill>
                 <a:latin typeface="맑은 고딕"/>
               </a:rPr>
-              <a:t>•  이 데이터베이스의 `DB_UNIQUE_NAME`은 `boston`</a:t>
+              <a:t>•  이 데이터베이스의 </a:t>
+            </a:r>
+            <a:r>
+              <a:rPr sz="1700" b="0">
+                <a:solidFill>
+                  <a:srgbClr val="222222"/>
+                </a:solidFill>
+                <a:latin typeface="Consolas"/>
+                <a:cs typeface="Consolas"/>
+              </a:rPr>
+              <a:t>DB_UNIQUE_NAME</a:t>
+            </a:r>
+            <a:r>
+              <a:rPr sz="1700" b="0">
+                <a:solidFill>
+                  <a:srgbClr val="222222"/>
+                </a:solidFill>
+                <a:latin typeface="맑은 고딕"/>
+              </a:rPr>
+              <a:t>은 </a:t>
+            </a:r>
+            <a:r>
+              <a:rPr sz="1700" b="0">
+                <a:solidFill>
+                  <a:srgbClr val="222222"/>
+                </a:solidFill>
+                <a:latin typeface="Consolas"/>
+                <a:cs typeface="Consolas"/>
+              </a:rPr>
+              <a:t>boston</a:t>
             </a:r>
           </a:p>
           <a:p>
@@ -6372,7 +6515,25 @@
                 </a:solidFill>
                 <a:latin typeface="맑은 고딕"/>
               </a:rPr>
-              <a:t>•  원인은 **파라미터 상속** — 6장 컨트롤 파일과 같은 구조</a:t>
+              <a:t>•  원인은 </a:t>
+            </a:r>
+            <a:r>
+              <a:rPr sz="1700" b="1">
+                <a:solidFill>
+                  <a:srgbClr val="222222"/>
+                </a:solidFill>
+                <a:latin typeface="맑은 고딕"/>
+              </a:rPr>
+              <a:t>파라미터 상속</a:t>
+            </a:r>
+            <a:r>
+              <a:rPr sz="1700" b="0">
+                <a:solidFill>
+                  <a:srgbClr val="222222"/>
+                </a:solidFill>
+                <a:latin typeface="맑은 고딕"/>
+              </a:rPr>
+              <a:t> — 6장 컨트롤 파일과 같은 구조</a:t>
             </a:r>
           </a:p>
         </p:txBody>
@@ -6567,7 +6728,26 @@
                 </a:solidFill>
                 <a:latin typeface="맑은 고딕"/>
               </a:rPr>
-              <a:t>•  `DB_RECOVERY_FILE_DEST`가 있어 아카이브는 FRA로 갔다</a:t>
+              <a:t>•  </a:t>
+            </a:r>
+            <a:r>
+              <a:rPr sz="1700" b="0">
+                <a:solidFill>
+                  <a:srgbClr val="222222"/>
+                </a:solidFill>
+                <a:latin typeface="Consolas"/>
+                <a:cs typeface="Consolas"/>
+              </a:rPr>
+              <a:t>DB_RECOVERY_FILE_DEST</a:t>
+            </a:r>
+            <a:r>
+              <a:rPr sz="1700" b="0">
+                <a:solidFill>
+                  <a:srgbClr val="222222"/>
+                </a:solidFill>
+                <a:latin typeface="맑은 고딕"/>
+              </a:rPr>
+              <a:t>가 있어 아카이브는 FRA로 갔다</a:t>
             </a:r>
           </a:p>
           <a:p>
@@ -6583,7 +6763,17 @@
                 </a:solidFill>
                 <a:latin typeface="맑은 고딕"/>
               </a:rPr>
-              <a:t>•  실측 : `.../fast_recovery_area/BOSTON/archivelog/2026_08_27/o1_mf_1_66_...arc`</a:t>
+              <a:t>•  실측 : </a:t>
+            </a:r>
+            <a:r>
+              <a:rPr sz="1700" b="0">
+                <a:solidFill>
+                  <a:srgbClr val="222222"/>
+                </a:solidFill>
+                <a:latin typeface="Consolas"/>
+                <a:cs typeface="Consolas"/>
+              </a:rPr>
+              <a:t>.../fast_recovery_area/BOSTON/archivelog/2026_08_27/o1_mf_1_66_...arc</a:t>
             </a:r>
           </a:p>
           <a:p>
@@ -6599,7 +6789,16 @@
                 </a:solidFill>
                 <a:latin typeface="맑은 고딕"/>
               </a:rPr>
-              <a:t>•  **기능은 동작하고 상태 열만 비정상**</a:t>
+              <a:t>•  </a:t>
+            </a:r>
+            <a:r>
+              <a:rPr sz="1700" b="1">
+                <a:solidFill>
+                  <a:srgbClr val="222222"/>
+                </a:solidFill>
+                <a:latin typeface="맑은 고딕"/>
+              </a:rPr>
+              <a:t>기능은 동작하고 상태 열만 비정상</a:t>
             </a:r>
           </a:p>
         </p:txBody>
@@ -6778,7 +6977,36 @@
                 </a:solidFill>
                 <a:latin typeface="맑은 고딕"/>
               </a:rPr>
-              <a:t>•  `db_unique_name=boston`으로 수정, `SCOPE=BOTH`</a:t>
+              <a:t>•  </a:t>
+            </a:r>
+            <a:r>
+              <a:rPr sz="1700" b="0">
+                <a:solidFill>
+                  <a:srgbClr val="222222"/>
+                </a:solidFill>
+                <a:latin typeface="Consolas"/>
+                <a:cs typeface="Consolas"/>
+              </a:rPr>
+              <a:t>db_unique_name=boston</a:t>
+            </a:r>
+            <a:r>
+              <a:rPr sz="1700" b="0">
+                <a:solidFill>
+                  <a:srgbClr val="222222"/>
+                </a:solidFill>
+                <a:latin typeface="맑은 고딕"/>
+              </a:rPr>
+              <a:t>으로 수정, </a:t>
+            </a:r>
+            <a:r>
+              <a:rPr sz="1700" b="0">
+                <a:solidFill>
+                  <a:srgbClr val="222222"/>
+                </a:solidFill>
+                <a:latin typeface="Consolas"/>
+                <a:cs typeface="Consolas"/>
+              </a:rPr>
+              <a:t>SCOPE=BOTH</a:t>
             </a:r>
           </a:p>
           <a:p>
@@ -6794,7 +7022,35 @@
                 </a:solidFill>
                 <a:latin typeface="맑은 고딕"/>
               </a:rPr>
-              <a:t>•  `STATUS` : BAD PARAM → **VALID**</a:t>
+              <a:t>•  </a:t>
+            </a:r>
+            <a:r>
+              <a:rPr sz="1700" b="0">
+                <a:solidFill>
+                  <a:srgbClr val="222222"/>
+                </a:solidFill>
+                <a:latin typeface="Consolas"/>
+                <a:cs typeface="Consolas"/>
+              </a:rPr>
+              <a:t>STATUS</a:t>
+            </a:r>
+            <a:r>
+              <a:rPr sz="1700" b="0">
+                <a:solidFill>
+                  <a:srgbClr val="222222"/>
+                </a:solidFill>
+                <a:latin typeface="맑은 고딕"/>
+              </a:rPr>
+              <a:t> : BAD PARAM → </a:t>
+            </a:r>
+            <a:r>
+              <a:rPr sz="1700" b="1">
+                <a:solidFill>
+                  <a:srgbClr val="222222"/>
+                </a:solidFill>
+                <a:latin typeface="맑은 고딕"/>
+              </a:rPr>
+              <a:t>VALID</a:t>
             </a:r>
           </a:p>
           <a:p>
@@ -6810,7 +7066,35 @@
                 </a:solidFill>
                 <a:latin typeface="맑은 고딕"/>
               </a:rPr>
-              <a:t>•  `RECOVERY_MODE` : IDLE → **MANAGED REAL TIME APPLY**</a:t>
+              <a:t>•  </a:t>
+            </a:r>
+            <a:r>
+              <a:rPr sz="1700" b="0">
+                <a:solidFill>
+                  <a:srgbClr val="222222"/>
+                </a:solidFill>
+                <a:latin typeface="Consolas"/>
+                <a:cs typeface="Consolas"/>
+              </a:rPr>
+              <a:t>RECOVERY_MODE</a:t>
+            </a:r>
+            <a:r>
+              <a:rPr sz="1700" b="0">
+                <a:solidFill>
+                  <a:srgbClr val="222222"/>
+                </a:solidFill>
+                <a:latin typeface="맑은 고딕"/>
+              </a:rPr>
+              <a:t> : IDLE → </a:t>
+            </a:r>
+            <a:r>
+              <a:rPr sz="1700" b="1">
+                <a:solidFill>
+                  <a:srgbClr val="222222"/>
+                </a:solidFill>
+                <a:latin typeface="맑은 고딕"/>
+              </a:rPr>
+              <a:t>MANAGED REAL TIME APPLY</a:t>
             </a:r>
           </a:p>
           <a:p>
@@ -7005,7 +7289,17 @@
                 </a:solidFill>
                 <a:latin typeface="맑은 고딕"/>
               </a:rPr>
-              <a:t>•  `2 ... VALID  REMOTE  WRONG VALID_TYPE`</a:t>
+              <a:t>•  </a:t>
+            </a:r>
+            <a:r>
+              <a:rPr sz="1700" b="0">
+                <a:solidFill>
+                  <a:srgbClr val="222222"/>
+                </a:solidFill>
+                <a:latin typeface="Consolas"/>
+                <a:cs typeface="Consolas"/>
+              </a:rPr>
+              <a:t>2 ... VALID  REMOTE  WRONG VALID_TYPE</a:t>
             </a:r>
           </a:p>
           <a:p>
@@ -7021,7 +7315,37 @@
                 </a:solidFill>
                 <a:latin typeface="맑은 고딕"/>
               </a:rPr>
-              <a:t>•  boston의 목적지 2번 : `valid_for=(online_logfile,**primary_role**)`</a:t>
+              <a:t>•  boston의 목적지 2번 : </a:t>
+            </a:r>
+            <a:r>
+              <a:rPr sz="1700" b="0">
+                <a:solidFill>
+                  <a:srgbClr val="222222"/>
+                </a:solidFill>
+                <a:latin typeface="Consolas"/>
+                <a:cs typeface="Consolas"/>
+              </a:rPr>
+              <a:t>valid_for=(online_logfile,</a:t>
+            </a:r>
+            <a:r>
+              <a:rPr sz="1700" b="1">
+                <a:solidFill>
+                  <a:srgbClr val="222222"/>
+                </a:solidFill>
+                <a:latin typeface="Consolas"/>
+                <a:cs typeface="Consolas"/>
+              </a:rPr>
+              <a:t>primary_role</a:t>
+            </a:r>
+            <a:r>
+              <a:rPr sz="1700" b="0">
+                <a:solidFill>
+                  <a:srgbClr val="222222"/>
+                </a:solidFill>
+                <a:latin typeface="Consolas"/>
+                <a:cs typeface="Consolas"/>
+              </a:rPr>
+              <a:t>)</a:t>
             </a:r>
           </a:p>
           <a:p>
@@ -7232,7 +7556,26 @@
                 </a:solidFill>
                 <a:latin typeface="맑은 고딕"/>
               </a:rPr>
-              <a:t>•  `CONTROL_FILES` (6장) — Standby에 Chicago 디렉터리</a:t>
+              <a:t>•  </a:t>
+            </a:r>
+            <a:r>
+              <a:rPr sz="1700" b="0">
+                <a:solidFill>
+                  <a:srgbClr val="222222"/>
+                </a:solidFill>
+                <a:latin typeface="Consolas"/>
+                <a:cs typeface="Consolas"/>
+              </a:rPr>
+              <a:t>CONTROL_FILES</a:t>
+            </a:r>
+            <a:r>
+              <a:rPr sz="1700" b="0">
+                <a:solidFill>
+                  <a:srgbClr val="222222"/>
+                </a:solidFill>
+                <a:latin typeface="맑은 고딕"/>
+              </a:rPr>
+              <a:t> (6장) — Standby에 Chicago 디렉터리</a:t>
             </a:r>
           </a:p>
           <a:p>
@@ -7248,7 +7591,26 @@
                 </a:solidFill>
                 <a:latin typeface="맑은 고딕"/>
               </a:rPr>
-              <a:t>•  `LOG_ARCHIVE_DEST_1` (7장) — BAD PARAM</a:t>
+              <a:t>•  </a:t>
+            </a:r>
+            <a:r>
+              <a:rPr sz="1700" b="0">
+                <a:solidFill>
+                  <a:srgbClr val="222222"/>
+                </a:solidFill>
+                <a:latin typeface="Consolas"/>
+                <a:cs typeface="Consolas"/>
+              </a:rPr>
+              <a:t>LOG_ARCHIVE_DEST_1</a:t>
+            </a:r>
+            <a:r>
+              <a:rPr sz="1700" b="0">
+                <a:solidFill>
+                  <a:srgbClr val="222222"/>
+                </a:solidFill>
+                <a:latin typeface="맑은 고딕"/>
+              </a:rPr>
+              <a:t> (7장) — BAD PARAM</a:t>
             </a:r>
           </a:p>
           <a:p>
@@ -7264,7 +7626,44 @@
                 </a:solidFill>
                 <a:latin typeface="맑은 고딕"/>
               </a:rPr>
-              <a:t>•  `FAL_CLIENT` (7장) — **증상 없음.** 값이 chicago였다</a:t>
+              <a:t>•  </a:t>
+            </a:r>
+            <a:r>
+              <a:rPr sz="1700" b="0">
+                <a:solidFill>
+                  <a:srgbClr val="222222"/>
+                </a:solidFill>
+                <a:latin typeface="Consolas"/>
+                <a:cs typeface="Consolas"/>
+              </a:rPr>
+              <a:t>FAL_CLIENT</a:t>
+            </a:r>
+            <a:r>
+              <a:rPr sz="1700" b="0">
+                <a:solidFill>
+                  <a:srgbClr val="222222"/>
+                </a:solidFill>
+                <a:latin typeface="맑은 고딕"/>
+              </a:rPr>
+              <a:t> (7장) — </a:t>
+            </a:r>
+            <a:r>
+              <a:rPr sz="1700" b="1">
+                <a:solidFill>
+                  <a:srgbClr val="222222"/>
+                </a:solidFill>
+                <a:latin typeface="맑은 고딕"/>
+              </a:rPr>
+              <a:t>증상 없음.</a:t>
+            </a:r>
+            <a:r>
+              <a:rPr sz="1700" b="0">
+                <a:solidFill>
+                  <a:srgbClr val="222222"/>
+                </a:solidFill>
+                <a:latin typeface="맑은 고딕"/>
+              </a:rPr>
+              <a:t> 값이 chicago였다</a:t>
             </a:r>
           </a:p>
           <a:p>
@@ -7280,7 +7679,45 @@
                 </a:solidFill>
                 <a:latin typeface="맑은 고딕"/>
               </a:rPr>
-              <a:t>•  `DB_NAME` (5장) — 스크립트가 `set db_name`으로 막아 냈다</a:t>
+              <a:t>•  </a:t>
+            </a:r>
+            <a:r>
+              <a:rPr sz="1700" b="0">
+                <a:solidFill>
+                  <a:srgbClr val="222222"/>
+                </a:solidFill>
+                <a:latin typeface="Consolas"/>
+                <a:cs typeface="Consolas"/>
+              </a:rPr>
+              <a:t>DB_NAME</a:t>
+            </a:r>
+            <a:r>
+              <a:rPr sz="1700" b="0">
+                <a:solidFill>
+                  <a:srgbClr val="222222"/>
+                </a:solidFill>
+                <a:latin typeface="맑은 고딕"/>
+              </a:rPr>
+              <a:t> (5장) — 스크립트가 </a:t>
+            </a:r>
+            <a:r>
+              <a:rPr sz="1700" b="0">
+                <a:solidFill>
+                  <a:srgbClr val="222222"/>
+                </a:solidFill>
+                <a:latin typeface="Consolas"/>
+                <a:cs typeface="Consolas"/>
+              </a:rPr>
+              <a:t>set db_name</a:t>
+            </a:r>
+            <a:r>
+              <a:rPr sz="1700" b="0">
+                <a:solidFill>
+                  <a:srgbClr val="222222"/>
+                </a:solidFill>
+                <a:latin typeface="맑은 고딕"/>
+              </a:rPr>
+              <a:t>으로 막아 냈다</a:t>
             </a:r>
           </a:p>
         </p:txBody>
@@ -7730,7 +8167,25 @@
                 </a:solidFill>
                 <a:latin typeface="맑은 고딕"/>
               </a:rPr>
-              <a:t>•  그러므로 : **로그를 전환하지 않고** 커밋한 행이 Standby에서 보이면 실시간</a:t>
+              <a:t>•  그러므로 : </a:t>
+            </a:r>
+            <a:r>
+              <a:rPr sz="1700" b="1">
+                <a:solidFill>
+                  <a:srgbClr val="222222"/>
+                </a:solidFill>
+                <a:latin typeface="맑은 고딕"/>
+              </a:rPr>
+              <a:t>로그를 전환하지 않고</a:t>
+            </a:r>
+            <a:r>
+              <a:rPr sz="1700" b="0">
+                <a:solidFill>
+                  <a:srgbClr val="222222"/>
+                </a:solidFill>
+                <a:latin typeface="맑은 고딕"/>
+              </a:rPr>
+              <a:t> 커밋한 행이 Standby에서 보이면 실시간</a:t>
             </a:r>
           </a:p>
           <a:p>
@@ -7746,7 +8201,26 @@
                 </a:solidFill>
                 <a:latin typeface="맑은 고딕"/>
               </a:rPr>
-              <a:t>•  보이지 않다가 `ARCHIVE LOG CURRENT` 후에 보이면 아카이브 적용</a:t>
+              <a:t>•  보이지 않다가 </a:t>
+            </a:r>
+            <a:r>
+              <a:rPr sz="1700" b="0">
+                <a:solidFill>
+                  <a:srgbClr val="222222"/>
+                </a:solidFill>
+                <a:latin typeface="Consolas"/>
+                <a:cs typeface="Consolas"/>
+              </a:rPr>
+              <a:t>ARCHIVE LOG CURRENT</a:t>
+            </a:r>
+            <a:r>
+              <a:rPr sz="1700" b="0">
+                <a:solidFill>
+                  <a:srgbClr val="222222"/>
+                </a:solidFill>
+                <a:latin typeface="맑은 고딕"/>
+              </a:rPr>
+              <a:t> 후에 보이면 아카이브 적용</a:t>
             </a:r>
           </a:p>
           <a:p>
@@ -7902,7 +8376,26 @@
                 </a:solidFill>
                 <a:latin typeface="맑은 고딕"/>
               </a:rPr>
-              <a:t>•  `V$MANAGED_STANDBY`의 프로세스(ARCH·DGRD·RFS·MRP0) 역할과 상태를 읽는다.</a:t>
+              <a:t>•  </a:t>
+            </a:r>
+            <a:r>
+              <a:rPr sz="1600" b="0">
+                <a:solidFill>
+                  <a:srgbClr val="222222"/>
+                </a:solidFill>
+                <a:latin typeface="Consolas"/>
+                <a:cs typeface="Consolas"/>
+              </a:rPr>
+              <a:t>V$MANAGED_STANDBY</a:t>
+            </a:r>
+            <a:r>
+              <a:rPr sz="1600" b="0">
+                <a:solidFill>
+                  <a:srgbClr val="222222"/>
+                </a:solidFill>
+                <a:latin typeface="맑은 고딕"/>
+              </a:rPr>
+              <a:t>의 프로세스(ARCH·DGRD·RFS·MRP0) 역할과 상태를 읽는다.</a:t>
             </a:r>
           </a:p>
           <a:p>
@@ -7934,7 +8427,45 @@
                 </a:solidFill>
                 <a:latin typeface="맑은 고딕"/>
               </a:rPr>
-              <a:t>•  Standby의 `LOG_ARCHIVE_DEST_1`이 `BAD PARAM`이 되는 원인을 진단하고 고친다.</a:t>
+              <a:t>•  Standby의 </a:t>
+            </a:r>
+            <a:r>
+              <a:rPr sz="1600" b="0">
+                <a:solidFill>
+                  <a:srgbClr val="222222"/>
+                </a:solidFill>
+                <a:latin typeface="Consolas"/>
+                <a:cs typeface="Consolas"/>
+              </a:rPr>
+              <a:t>LOG_ARCHIVE_DEST_1</a:t>
+            </a:r>
+            <a:r>
+              <a:rPr sz="1600" b="0">
+                <a:solidFill>
+                  <a:srgbClr val="222222"/>
+                </a:solidFill>
+                <a:latin typeface="맑은 고딕"/>
+              </a:rPr>
+              <a:t>이 </a:t>
+            </a:r>
+            <a:r>
+              <a:rPr sz="1600" b="0">
+                <a:solidFill>
+                  <a:srgbClr val="222222"/>
+                </a:solidFill>
+                <a:latin typeface="Consolas"/>
+                <a:cs typeface="Consolas"/>
+              </a:rPr>
+              <a:t>BAD PARAM</a:t>
+            </a:r>
+            <a:r>
+              <a:rPr sz="1600" b="0">
+                <a:solidFill>
+                  <a:srgbClr val="222222"/>
+                </a:solidFill>
+                <a:latin typeface="맑은 고딕"/>
+              </a:rPr>
+              <a:t>이 되는 원인을 진단하고 고친다.</a:t>
             </a:r>
           </a:p>
           <a:p>
@@ -7950,7 +8481,26 @@
                 </a:solidFill>
                 <a:latin typeface="맑은 고딕"/>
               </a:rPr>
-              <a:t>•  `RECOVERY_MODE` 열과 기능 시험으로 실시간 적용 여부를 교차 검증한다.</a:t>
+              <a:t>•  </a:t>
+            </a:r>
+            <a:r>
+              <a:rPr sz="1600" b="0">
+                <a:solidFill>
+                  <a:srgbClr val="222222"/>
+                </a:solidFill>
+                <a:latin typeface="Consolas"/>
+                <a:cs typeface="Consolas"/>
+              </a:rPr>
+              <a:t>RECOVERY_MODE</a:t>
+            </a:r>
+            <a:r>
+              <a:rPr sz="1600" b="0">
+                <a:solidFill>
+                  <a:srgbClr val="222222"/>
+                </a:solidFill>
+                <a:latin typeface="맑은 고딕"/>
+              </a:rPr>
+              <a:t> 열과 기능 시험으로 실시간 적용 여부를 교차 검증한다.</a:t>
             </a:r>
           </a:p>
           <a:p>
@@ -7966,7 +8516,26 @@
                 </a:solidFill>
                 <a:latin typeface="맑은 고딕"/>
               </a:rPr>
-              <a:t>•  19c에서 `USING CURRENT LOGFILE`이 사실상 불필요해진 것을 실측으로 확인한다.</a:t>
+              <a:t>•  19c에서 </a:t>
+            </a:r>
+            <a:r>
+              <a:rPr sz="1600" b="0">
+                <a:solidFill>
+                  <a:srgbClr val="222222"/>
+                </a:solidFill>
+                <a:latin typeface="Consolas"/>
+                <a:cs typeface="Consolas"/>
+              </a:rPr>
+              <a:t>USING CURRENT LOGFILE</a:t>
+            </a:r>
+            <a:r>
+              <a:rPr sz="1600" b="0">
+                <a:solidFill>
+                  <a:srgbClr val="222222"/>
+                </a:solidFill>
+                <a:latin typeface="맑은 고딕"/>
+              </a:rPr>
+              <a:t>이 사실상 불필요해진 것을 실측으로 확인한다.</a:t>
             </a:r>
           </a:p>
           <a:p>
@@ -7982,7 +8551,26 @@
                 </a:solidFill>
                 <a:latin typeface="맑은 고딕"/>
               </a:rPr>
-              <a:t>•  갭을 만들어 `V$ARCHIVE_GAP`으로 관찰하고 해소 과정을 추적한다.</a:t>
+              <a:t>•  갭을 만들어 </a:t>
+            </a:r>
+            <a:r>
+              <a:rPr sz="1600" b="0">
+                <a:solidFill>
+                  <a:srgbClr val="222222"/>
+                </a:solidFill>
+                <a:latin typeface="Consolas"/>
+                <a:cs typeface="Consolas"/>
+              </a:rPr>
+              <a:t>V$ARCHIVE_GAP</a:t>
+            </a:r>
+            <a:r>
+              <a:rPr sz="1600" b="0">
+                <a:solidFill>
+                  <a:srgbClr val="222222"/>
+                </a:solidFill>
+                <a:latin typeface="맑은 고딕"/>
+              </a:rPr>
+              <a:t>으로 관찰하고 해소 과정을 추적한다.</a:t>
             </a:r>
           </a:p>
           <a:p>
@@ -7998,7 +8586,26 @@
                 </a:solidFill>
                 <a:latin typeface="맑은 고딕"/>
               </a:rPr>
-              <a:t>•  `V$DATAGUARD_STATS` 네 행과 두 시각 열의 차이를 안다.</a:t>
+              <a:t>•  </a:t>
+            </a:r>
+            <a:r>
+              <a:rPr sz="1600" b="0">
+                <a:solidFill>
+                  <a:srgbClr val="222222"/>
+                </a:solidFill>
+                <a:latin typeface="Consolas"/>
+                <a:cs typeface="Consolas"/>
+              </a:rPr>
+              <a:t>V$DATAGUARD_STATS</a:t>
+            </a:r>
+            <a:r>
+              <a:rPr sz="1600" b="0">
+                <a:solidFill>
+                  <a:srgbClr val="222222"/>
+                </a:solidFill>
+                <a:latin typeface="맑은 고딕"/>
+              </a:rPr>
+              <a:t> 네 행과 두 시각 열의 차이를 안다.</a:t>
             </a:r>
           </a:p>
         </p:txBody>
@@ -8177,7 +8784,26 @@
                 </a:solidFill>
                 <a:latin typeface="맑은 고딕"/>
               </a:rPr>
-              <a:t>•  `... DISCONNECT FROM SESSION` → MANAGED REAL TIME APPLY, 40초 내 보임</a:t>
+              <a:t>•  </a:t>
+            </a:r>
+            <a:r>
+              <a:rPr sz="1700" b="0">
+                <a:solidFill>
+                  <a:srgbClr val="222222"/>
+                </a:solidFill>
+                <a:latin typeface="Consolas"/>
+                <a:cs typeface="Consolas"/>
+              </a:rPr>
+              <a:t>... DISCONNECT FROM SESSION</a:t>
+            </a:r>
+            <a:r>
+              <a:rPr sz="1700" b="0">
+                <a:solidFill>
+                  <a:srgbClr val="222222"/>
+                </a:solidFill>
+                <a:latin typeface="맑은 고딕"/>
+              </a:rPr>
+              <a:t> → MANAGED REAL TIME APPLY, 40초 내 보임</a:t>
             </a:r>
           </a:p>
           <a:p>
@@ -8193,7 +8819,26 @@
                 </a:solidFill>
                 <a:latin typeface="맑은 고딕"/>
               </a:rPr>
-              <a:t>•  `... USING CURRENT LOGFILE ...` → MANAGED REAL TIME APPLY, 20초 내 보임</a:t>
+              <a:t>•  </a:t>
+            </a:r>
+            <a:r>
+              <a:rPr sz="1700" b="0">
+                <a:solidFill>
+                  <a:srgbClr val="222222"/>
+                </a:solidFill>
+                <a:latin typeface="Consolas"/>
+                <a:cs typeface="Consolas"/>
+              </a:rPr>
+              <a:t>... USING CURRENT LOGFILE ...</a:t>
+            </a:r>
+            <a:r>
+              <a:rPr sz="1700" b="0">
+                <a:solidFill>
+                  <a:srgbClr val="222222"/>
+                </a:solidFill>
+                <a:latin typeface="맑은 고딕"/>
+              </a:rPr>
+              <a:t> → MANAGED REAL TIME APPLY, 20초 내 보임</a:t>
             </a:r>
           </a:p>
           <a:p>
@@ -8209,7 +8854,16 @@
                 </a:solidFill>
                 <a:latin typeface="맑은 고딕"/>
               </a:rPr>
-              <a:t>•  **SRL이 있으면 12.2 이후 실시간 적용이 기본**</a:t>
+              <a:t>•  </a:t>
+            </a:r>
+            <a:r>
+              <a:rPr sz="1700" b="1">
+                <a:solidFill>
+                  <a:srgbClr val="222222"/>
+                </a:solidFill>
+                <a:latin typeface="맑은 고딕"/>
+              </a:rPr>
+              <a:t>SRL이 있으면 12.2 이후 실시간 적용이 기본</a:t>
             </a:r>
           </a:p>
           <a:p>
@@ -8225,7 +8879,26 @@
                 </a:solidFill>
                 <a:latin typeface="맑은 고딕"/>
               </a:rPr>
-              <a:t>•  `USING CURRENT LOGFILE`은 받아들여지지만 동작을 바꾸지 않는다</a:t>
+              <a:t>•  </a:t>
+            </a:r>
+            <a:r>
+              <a:rPr sz="1700" b="0">
+                <a:solidFill>
+                  <a:srgbClr val="222222"/>
+                </a:solidFill>
+                <a:latin typeface="Consolas"/>
+                <a:cs typeface="Consolas"/>
+              </a:rPr>
+              <a:t>USING CURRENT LOGFILE</a:t>
+            </a:r>
+            <a:r>
+              <a:rPr sz="1700" b="0">
+                <a:solidFill>
+                  <a:srgbClr val="222222"/>
+                </a:solidFill>
+                <a:latin typeface="맑은 고딕"/>
+              </a:rPr>
+              <a:t>은 받아들여지지만 동작을 바꾸지 않는다</a:t>
             </a:r>
           </a:p>
         </p:txBody>
@@ -8659,7 +9332,26 @@
                 </a:solidFill>
                 <a:latin typeface="맑은 고딕"/>
               </a:rPr>
-              <a:t>•  Standby: CANCEL / Primary: `ARCHIVE LOG CURRENT` × 3</a:t>
+              <a:t>•  Standby: CANCEL / Primary: </a:t>
+            </a:r>
+            <a:r>
+              <a:rPr sz="1700" b="0">
+                <a:solidFill>
+                  <a:srgbClr val="222222"/>
+                </a:solidFill>
+                <a:latin typeface="Consolas"/>
+                <a:cs typeface="Consolas"/>
+              </a:rPr>
+              <a:t>ARCHIVE LOG CURRENT</a:t>
+            </a:r>
+            <a:r>
+              <a:rPr sz="1700" b="0">
+                <a:solidFill>
+                  <a:srgbClr val="222222"/>
+                </a:solidFill>
+                <a:latin typeface="맑은 고딕"/>
+              </a:rPr>
+              <a:t> × 3</a:t>
             </a:r>
           </a:p>
           <a:p>
@@ -8675,7 +9367,26 @@
                 </a:solidFill>
                 <a:latin typeface="맑은 고딕"/>
               </a:rPr>
-              <a:t>•  `V$ARCHIVE_GAP` : thread 1, 64 ~ 65</a:t>
+              <a:t>•  </a:t>
+            </a:r>
+            <a:r>
+              <a:rPr sz="1700" b="0">
+                <a:solidFill>
+                  <a:srgbClr val="222222"/>
+                </a:solidFill>
+                <a:latin typeface="Consolas"/>
+                <a:cs typeface="Consolas"/>
+              </a:rPr>
+              <a:t>V$ARCHIVE_GAP</a:t>
+            </a:r>
+            <a:r>
+              <a:rPr sz="1700" b="0">
+                <a:solidFill>
+                  <a:srgbClr val="222222"/>
+                </a:solidFill>
+                <a:latin typeface="맑은 고딕"/>
+              </a:rPr>
+              <a:t> : thread 1, 64 ~ 65</a:t>
             </a:r>
           </a:p>
           <a:p>
@@ -8691,7 +9402,16 @@
                 </a:solidFill>
                 <a:latin typeface="맑은 고딕"/>
               </a:rPr>
-              <a:t>•  받은 것 66 / 적용한 것 61 — **다섯 개 밀림**</a:t>
+              <a:t>•  받은 것 66 / 적용한 것 61 — </a:t>
+            </a:r>
+            <a:r>
+              <a:rPr sz="1700" b="1">
+                <a:solidFill>
+                  <a:srgbClr val="222222"/>
+                </a:solidFill>
+                <a:latin typeface="맑은 고딕"/>
+              </a:rPr>
+              <a:t>다섯 개 밀림</a:t>
             </a:r>
           </a:p>
           <a:p>
@@ -8934,7 +9654,26 @@
                 </a:solidFill>
                 <a:latin typeface="맑은 고딕"/>
               </a:rPr>
-              <a:t>•  `apply lag &gt;= transport lag`이 정상 관계</a:t>
+              <a:t>•  </a:t>
+            </a:r>
+            <a:r>
+              <a:rPr sz="1700" b="0">
+                <a:solidFill>
+                  <a:srgbClr val="222222"/>
+                </a:solidFill>
+                <a:latin typeface="Consolas"/>
+                <a:cs typeface="Consolas"/>
+              </a:rPr>
+              <a:t>apply lag &gt;= transport lag</a:t>
+            </a:r>
+            <a:r>
+              <a:rPr sz="1700" b="0">
+                <a:solidFill>
+                  <a:srgbClr val="222222"/>
+                </a:solidFill>
+                <a:latin typeface="맑은 고딕"/>
+              </a:rPr>
+              <a:t>이 정상 관계</a:t>
             </a:r>
           </a:p>
         </p:txBody>
@@ -9113,7 +9852,64 @@
                 </a:solidFill>
                 <a:latin typeface="맑은 고딕"/>
               </a:rPr>
-              <a:t>•  `transport lag` / `apply lag` — 과거. `DATUM_TIME`이 있다</a:t>
+              <a:t>•  </a:t>
+            </a:r>
+            <a:r>
+              <a:rPr sz="1700" b="0">
+                <a:solidFill>
+                  <a:srgbClr val="222222"/>
+                </a:solidFill>
+                <a:latin typeface="Consolas"/>
+                <a:cs typeface="Consolas"/>
+              </a:rPr>
+              <a:t>transport lag</a:t>
+            </a:r>
+            <a:r>
+              <a:rPr sz="1700" b="0">
+                <a:solidFill>
+                  <a:srgbClr val="222222"/>
+                </a:solidFill>
+                <a:latin typeface="맑은 고딕"/>
+              </a:rPr>
+              <a:t> / </a:t>
+            </a:r>
+            <a:r>
+              <a:rPr sz="1700" b="0">
+                <a:solidFill>
+                  <a:srgbClr val="222222"/>
+                </a:solidFill>
+                <a:latin typeface="Consolas"/>
+                <a:cs typeface="Consolas"/>
+              </a:rPr>
+              <a:t>apply lag</a:t>
+            </a:r>
+            <a:r>
+              <a:rPr sz="1700" b="0">
+                <a:solidFill>
+                  <a:srgbClr val="222222"/>
+                </a:solidFill>
+                <a:latin typeface="맑은 고딕"/>
+              </a:rPr>
+              <a:t> — 과거. </a:t>
+            </a:r>
+            <a:r>
+              <a:rPr sz="1700" b="0">
+                <a:solidFill>
+                  <a:srgbClr val="222222"/>
+                </a:solidFill>
+                <a:latin typeface="Consolas"/>
+                <a:cs typeface="Consolas"/>
+              </a:rPr>
+              <a:t>DATUM_TIME</a:t>
+            </a:r>
+            <a:r>
+              <a:rPr sz="1700" b="0">
+                <a:solidFill>
+                  <a:srgbClr val="222222"/>
+                </a:solidFill>
+                <a:latin typeface="맑은 고딕"/>
+              </a:rPr>
+              <a:t>이 있다</a:t>
             </a:r>
           </a:p>
           <a:p>
@@ -9129,7 +9925,26 @@
                 </a:solidFill>
                 <a:latin typeface="맑은 고딕"/>
               </a:rPr>
-              <a:t>•  `apply finish time` — 밀린 것을 다 적용하는 데 걸릴 시간</a:t>
+              <a:t>•  </a:t>
+            </a:r>
+            <a:r>
+              <a:rPr sz="1700" b="0">
+                <a:solidFill>
+                  <a:srgbClr val="222222"/>
+                </a:solidFill>
+                <a:latin typeface="Consolas"/>
+                <a:cs typeface="Consolas"/>
+              </a:rPr>
+              <a:t>apply finish time</a:t>
+            </a:r>
+            <a:r>
+              <a:rPr sz="1700" b="0">
+                <a:solidFill>
+                  <a:srgbClr val="222222"/>
+                </a:solidFill>
+                <a:latin typeface="맑은 고딕"/>
+              </a:rPr>
+              <a:t> — 밀린 것을 다 적용하는 데 걸릴 시간</a:t>
             </a:r>
           </a:p>
           <a:p>
@@ -9145,7 +9960,35 @@
                 </a:solidFill>
                 <a:latin typeface="맑은 고딕"/>
               </a:rPr>
-              <a:t>•  `estimated startup time` — 실측 **8초**</a:t>
+              <a:t>•  </a:t>
+            </a:r>
+            <a:r>
+              <a:rPr sz="1700" b="0">
+                <a:solidFill>
+                  <a:srgbClr val="222222"/>
+                </a:solidFill>
+                <a:latin typeface="Consolas"/>
+                <a:cs typeface="Consolas"/>
+              </a:rPr>
+              <a:t>estimated startup time</a:t>
+            </a:r>
+            <a:r>
+              <a:rPr sz="1700" b="0">
+                <a:solidFill>
+                  <a:srgbClr val="222222"/>
+                </a:solidFill>
+                <a:latin typeface="맑은 고딕"/>
+              </a:rPr>
+              <a:t> — 실측 </a:t>
+            </a:r>
+            <a:r>
+              <a:rPr sz="1700" b="1">
+                <a:solidFill>
+                  <a:srgbClr val="222222"/>
+                </a:solidFill>
+                <a:latin typeface="맑은 고딕"/>
+              </a:rPr>
+              <a:t>8초</a:t>
             </a:r>
           </a:p>
           <a:p>
@@ -9161,7 +10004,26 @@
                 </a:solidFill>
                 <a:latin typeface="맑은 고딕"/>
               </a:rPr>
-              <a:t>•  뒤의 둘은 예측이라 `DATUM_TIME`이 없다</a:t>
+              <a:t>•  뒤의 둘은 예측이라 </a:t>
+            </a:r>
+            <a:r>
+              <a:rPr sz="1700" b="0">
+                <a:solidFill>
+                  <a:srgbClr val="222222"/>
+                </a:solidFill>
+                <a:latin typeface="Consolas"/>
+                <a:cs typeface="Consolas"/>
+              </a:rPr>
+              <a:t>DATUM_TIME</a:t>
+            </a:r>
+            <a:r>
+              <a:rPr sz="1700" b="0">
+                <a:solidFill>
+                  <a:srgbClr val="222222"/>
+                </a:solidFill>
+                <a:latin typeface="맑은 고딕"/>
+              </a:rPr>
+              <a:t>이 없다</a:t>
             </a:r>
           </a:p>
         </p:txBody>
@@ -9340,7 +10202,26 @@
                 </a:solidFill>
                 <a:latin typeface="맑은 고딕"/>
               </a:rPr>
-              <a:t>•  `TIME_COMPUTED` 10:43:24 — 계산한 시각</a:t>
+              <a:t>•  </a:t>
+            </a:r>
+            <a:r>
+              <a:rPr sz="1700" b="0">
+                <a:solidFill>
+                  <a:srgbClr val="222222"/>
+                </a:solidFill>
+                <a:latin typeface="Consolas"/>
+                <a:cs typeface="Consolas"/>
+              </a:rPr>
+              <a:t>TIME_COMPUTED</a:t>
+            </a:r>
+            <a:r>
+              <a:rPr sz="1700" b="0">
+                <a:solidFill>
+                  <a:srgbClr val="222222"/>
+                </a:solidFill>
+                <a:latin typeface="맑은 고딕"/>
+              </a:rPr>
+              <a:t> 10:43:24 — 계산한 시각</a:t>
             </a:r>
           </a:p>
           <a:p>
@@ -9356,7 +10237,26 @@
                 </a:solidFill>
                 <a:latin typeface="맑은 고딕"/>
               </a:rPr>
-              <a:t>•  `DATUM_TIME` 10:43:12 — 근거가 된 정보의 시각</a:t>
+              <a:t>•  </a:t>
+            </a:r>
+            <a:r>
+              <a:rPr sz="1700" b="0">
+                <a:solidFill>
+                  <a:srgbClr val="222222"/>
+                </a:solidFill>
+                <a:latin typeface="Consolas"/>
+                <a:cs typeface="Consolas"/>
+              </a:rPr>
+              <a:t>DATUM_TIME</a:t>
+            </a:r>
+            <a:r>
+              <a:rPr sz="1700" b="0">
+                <a:solidFill>
+                  <a:srgbClr val="222222"/>
+                </a:solidFill>
+                <a:latin typeface="맑은 고딕"/>
+              </a:rPr>
+              <a:t> 10:43:12 — 근거가 된 정보의 시각</a:t>
             </a:r>
           </a:p>
           <a:p>
@@ -9372,7 +10272,16 @@
                 </a:solidFill>
                 <a:latin typeface="맑은 고딕"/>
               </a:rPr>
-              <a:t>•  **"apply lag이 0이다" = "십수 초 전에는 0이었다"**</a:t>
+              <a:t>•  </a:t>
+            </a:r>
+            <a:r>
+              <a:rPr sz="1700" b="1">
+                <a:solidFill>
+                  <a:srgbClr val="222222"/>
+                </a:solidFill>
+                <a:latin typeface="맑은 고딕"/>
+              </a:rPr>
+              <a:t>"apply lag이 0이다" = "십수 초 전에는 0이었다"</a:t>
             </a:r>
           </a:p>
           <a:p>
@@ -9567,7 +10476,26 @@
                 </a:solidFill>
                 <a:latin typeface="맑은 고딕"/>
               </a:rPr>
-              <a:t>•  `transport lag`만 크다 → 네트워크·전송 경로</a:t>
+              <a:t>•  </a:t>
+            </a:r>
+            <a:r>
+              <a:rPr sz="1700" b="0">
+                <a:solidFill>
+                  <a:srgbClr val="222222"/>
+                </a:solidFill>
+                <a:latin typeface="Consolas"/>
+                <a:cs typeface="Consolas"/>
+              </a:rPr>
+              <a:t>transport lag</a:t>
+            </a:r>
+            <a:r>
+              <a:rPr sz="1700" b="0">
+                <a:solidFill>
+                  <a:srgbClr val="222222"/>
+                </a:solidFill>
+                <a:latin typeface="맑은 고딕"/>
+              </a:rPr>
+              <a:t>만 크다 → 네트워크·전송 경로</a:t>
             </a:r>
           </a:p>
           <a:p>
@@ -9583,7 +10511,26 @@
                 </a:solidFill>
                 <a:latin typeface="맑은 고딕"/>
               </a:rPr>
-              <a:t>•  `apply lag`만 크다 → Standby의 적용 성능</a:t>
+              <a:t>•  </a:t>
+            </a:r>
+            <a:r>
+              <a:rPr sz="1700" b="0">
+                <a:solidFill>
+                  <a:srgbClr val="222222"/>
+                </a:solidFill>
+                <a:latin typeface="Consolas"/>
+                <a:cs typeface="Consolas"/>
+              </a:rPr>
+              <a:t>apply lag</a:t>
+            </a:r>
+            <a:r>
+              <a:rPr sz="1700" b="0">
+                <a:solidFill>
+                  <a:srgbClr val="222222"/>
+                </a:solidFill>
+                <a:latin typeface="맑은 고딕"/>
+              </a:rPr>
+              <a:t>만 크다 → Standby의 적용 성능</a:t>
             </a:r>
           </a:p>
           <a:p>
@@ -9615,7 +10562,16 @@
                 </a:solidFill>
                 <a:latin typeface="맑은 고딕"/>
               </a:rPr>
-              <a:t>•  **둘 다 0인데 데이터가 최신이 아니다 → 적용이 멈췄다**</a:t>
+              <a:t>•  </a:t>
+            </a:r>
+            <a:r>
+              <a:rPr sz="1700" b="1">
+                <a:solidFill>
+                  <a:srgbClr val="222222"/>
+                </a:solidFill>
+                <a:latin typeface="맑은 고딕"/>
+              </a:rPr>
+              <a:t>둘 다 0인데 데이터가 최신이 아니다 → 적용이 멈췄다</a:t>
             </a:r>
           </a:p>
         </p:txBody>
@@ -10049,7 +11005,26 @@
                 </a:solidFill>
                 <a:latin typeface="맑은 고딕"/>
               </a:rPr>
-              <a:t>•  `RECOVERY_MODE` 유지, 전환 없이 커밋한 행 40초 내 보임</a:t>
+              <a:t>•  </a:t>
+            </a:r>
+            <a:r>
+              <a:rPr sz="1700" b="0">
+                <a:solidFill>
+                  <a:srgbClr val="222222"/>
+                </a:solidFill>
+                <a:latin typeface="Consolas"/>
+                <a:cs typeface="Consolas"/>
+              </a:rPr>
+              <a:t>RECOVERY_MODE</a:t>
+            </a:r>
+            <a:r>
+              <a:rPr sz="1700" b="0">
+                <a:solidFill>
+                  <a:srgbClr val="222222"/>
+                </a:solidFill>
+                <a:latin typeface="맑은 고딕"/>
+              </a:rPr>
+              <a:t> 유지, 전환 없이 커밋한 행 40초 내 보임</a:t>
             </a:r>
           </a:p>
           <a:p>
@@ -10065,7 +11040,16 @@
                 </a:solidFill>
                 <a:latin typeface="맑은 고딕"/>
               </a:rPr>
-              <a:t>•  4장의 "온라인 + 1" 규칙은 **최소 요건이 아니라 여유를 위한 권장**</a:t>
+              <a:t>•  4장의 "온라인 + 1" 규칙은 </a:t>
+            </a:r>
+            <a:r>
+              <a:rPr sz="1700" b="1">
+                <a:solidFill>
+                  <a:srgbClr val="222222"/>
+                </a:solidFill>
+                <a:latin typeface="맑은 고딕"/>
+              </a:rPr>
+              <a:t>최소 요건이 아니라 여유를 위한 권장</a:t>
             </a:r>
           </a:p>
           <a:p>
@@ -10260,7 +11244,54 @@
                 </a:solidFill>
                 <a:latin typeface="맑은 고딕"/>
               </a:rPr>
-              <a:t>•  ACTIVE인 SRL 삭제 → `ORA-00261` + `ORA-00312` **두 줄**</a:t>
+              <a:t>•  ACTIVE인 SRL 삭제 → </a:t>
+            </a:r>
+            <a:r>
+              <a:rPr sz="1700" b="0">
+                <a:solidFill>
+                  <a:srgbClr val="222222"/>
+                </a:solidFill>
+                <a:latin typeface="Consolas"/>
+                <a:cs typeface="Consolas"/>
+              </a:rPr>
+              <a:t>ORA-00261</a:t>
+            </a:r>
+            <a:r>
+              <a:rPr sz="1700" b="0">
+                <a:solidFill>
+                  <a:srgbClr val="222222"/>
+                </a:solidFill>
+                <a:latin typeface="맑은 고딕"/>
+              </a:rPr>
+              <a:t> + </a:t>
+            </a:r>
+            <a:r>
+              <a:rPr sz="1700" b="0">
+                <a:solidFill>
+                  <a:srgbClr val="222222"/>
+                </a:solidFill>
+                <a:latin typeface="Consolas"/>
+                <a:cs typeface="Consolas"/>
+              </a:rPr>
+              <a:t>ORA-00312</a:t>
+            </a:r>
+            <a:r>
+              <a:rPr sz="1700" b="0">
+                <a:solidFill>
+                  <a:srgbClr val="222222"/>
+                </a:solidFill>
+                <a:latin typeface="맑은 고딕"/>
+              </a:rPr>
+              <a:t> </a:t>
+            </a:r>
+            <a:r>
+              <a:rPr sz="1700" b="1">
+                <a:solidFill>
+                  <a:srgbClr val="222222"/>
+                </a:solidFill>
+                <a:latin typeface="맑은 고딕"/>
+              </a:rPr>
+              <a:t>두 줄</a:t>
             </a:r>
           </a:p>
           <a:p>
@@ -10292,7 +11323,17 @@
                 </a:solidFill>
                 <a:latin typeface="맑은 고딕"/>
               </a:rPr>
-              <a:t>•  이미 있는 그룹 번호로 추가 → `ORA-01184`</a:t>
+              <a:t>•  이미 있는 그룹 번호로 추가 → </a:t>
+            </a:r>
+            <a:r>
+              <a:rPr sz="1700" b="0">
+                <a:solidFill>
+                  <a:srgbClr val="222222"/>
+                </a:solidFill>
+                <a:latin typeface="Consolas"/>
+                <a:cs typeface="Consolas"/>
+              </a:rPr>
+              <a:t>ORA-01184</a:t>
             </a:r>
           </a:p>
           <a:p>
@@ -10771,7 +11812,36 @@
                 </a:solidFill>
                 <a:latin typeface="맑은 고딕"/>
               </a:rPr>
-              <a:t>•  `mrp` 행에 `NVL(..., '*** NOT RUNNING ***')`</a:t>
+              <a:t>•  </a:t>
+            </a:r>
+            <a:r>
+              <a:rPr sz="1700" b="0">
+                <a:solidFill>
+                  <a:srgbClr val="222222"/>
+                </a:solidFill>
+                <a:latin typeface="Consolas"/>
+                <a:cs typeface="Consolas"/>
+              </a:rPr>
+              <a:t>mrp</a:t>
+            </a:r>
+            <a:r>
+              <a:rPr sz="1700" b="0">
+                <a:solidFill>
+                  <a:srgbClr val="222222"/>
+                </a:solidFill>
+                <a:latin typeface="맑은 고딕"/>
+              </a:rPr>
+              <a:t> 행에 </a:t>
+            </a:r>
+            <a:r>
+              <a:rPr sz="1700" b="0">
+                <a:solidFill>
+                  <a:srgbClr val="222222"/>
+                </a:solidFill>
+                <a:latin typeface="Consolas"/>
+                <a:cs typeface="Consolas"/>
+              </a:rPr>
+              <a:t>NVL(..., '*** NOT RUNNING ***')</a:t>
             </a:r>
           </a:p>
           <a:p>
@@ -10982,7 +12052,26 @@
                 </a:solidFill>
                 <a:latin typeface="맑은 고딕"/>
               </a:rPr>
-              <a:t>•  ② `RECOVERY_MODE` — IDLE이면 ③을 먼저 본다</a:t>
+              <a:t>•  ② </a:t>
+            </a:r>
+            <a:r>
+              <a:rPr sz="1700" b="0">
+                <a:solidFill>
+                  <a:srgbClr val="222222"/>
+                </a:solidFill>
+                <a:latin typeface="Consolas"/>
+                <a:cs typeface="Consolas"/>
+              </a:rPr>
+              <a:t>RECOVERY_MODE</a:t>
+            </a:r>
+            <a:r>
+              <a:rPr sz="1700" b="0">
+                <a:solidFill>
+                  <a:srgbClr val="222222"/>
+                </a:solidFill>
+                <a:latin typeface="맑은 고딕"/>
+              </a:rPr>
+              <a:t> — IDLE이면 ③을 먼저 본다</a:t>
             </a:r>
           </a:p>
           <a:p>
@@ -10998,7 +12087,26 @@
                 </a:solidFill>
                 <a:latin typeface="맑은 고딕"/>
               </a:rPr>
-              <a:t>•  ③ 목적지 `STATUS` — BAD PARAM이면 ②를 믿을 수 없다</a:t>
+              <a:t>•  ③ 목적지 </a:t>
+            </a:r>
+            <a:r>
+              <a:rPr sz="1700" b="0">
+                <a:solidFill>
+                  <a:srgbClr val="222222"/>
+                </a:solidFill>
+                <a:latin typeface="Consolas"/>
+                <a:cs typeface="Consolas"/>
+              </a:rPr>
+              <a:t>STATUS</a:t>
+            </a:r>
+            <a:r>
+              <a:rPr sz="1700" b="0">
+                <a:solidFill>
+                  <a:srgbClr val="222222"/>
+                </a:solidFill>
+                <a:latin typeface="맑은 고딕"/>
+              </a:rPr>
+              <a:t> — BAD PARAM이면 ②를 믿을 수 없다</a:t>
             </a:r>
           </a:p>
           <a:p>
@@ -11193,7 +12301,26 @@
                 </a:solidFill>
                 <a:latin typeface="맑은 고딕"/>
               </a:rPr>
-              <a:t>•  `RECOVERY_MODE = IDLE` 이 두 가지 상황에서 나온다</a:t>
+              <a:t>•  </a:t>
+            </a:r>
+            <a:r>
+              <a:rPr sz="1700" b="0">
+                <a:solidFill>
+                  <a:srgbClr val="222222"/>
+                </a:solidFill>
+                <a:latin typeface="Consolas"/>
+                <a:cs typeface="Consolas"/>
+              </a:rPr>
+              <a:t>RECOVERY_MODE = IDLE</a:t>
+            </a:r>
+            <a:r>
+              <a:rPr sz="1700" b="0">
+                <a:solidFill>
+                  <a:srgbClr val="222222"/>
+                </a:solidFill>
+                <a:latin typeface="맑은 고딕"/>
+              </a:rPr>
+              <a:t> 이 두 가지 상황에서 나온다</a:t>
             </a:r>
           </a:p>
           <a:p>
@@ -11209,7 +12336,26 @@
                 </a:solidFill>
                 <a:latin typeface="맑은 고딕"/>
               </a:rPr>
-              <a:t>•  ① 목적지가 `BAD PARAM` — 7.4절의 사례</a:t>
+              <a:t>•  ① 목적지가 </a:t>
+            </a:r>
+            <a:r>
+              <a:rPr sz="1700" b="0">
+                <a:solidFill>
+                  <a:srgbClr val="222222"/>
+                </a:solidFill>
+                <a:latin typeface="Consolas"/>
+                <a:cs typeface="Consolas"/>
+              </a:rPr>
+              <a:t>BAD PARAM</a:t>
+            </a:r>
+            <a:r>
+              <a:rPr sz="1700" b="0">
+                <a:solidFill>
+                  <a:srgbClr val="222222"/>
+                </a:solidFill>
+                <a:latin typeface="맑은 고딕"/>
+              </a:rPr>
+              <a:t> — 7.4절의 사례</a:t>
             </a:r>
           </a:p>
           <a:p>
@@ -11241,7 +12387,26 @@
                 </a:solidFill>
                 <a:latin typeface="맑은 고딕"/>
               </a:rPr>
-              <a:t>•  `STATUS`가 VALID인지 아닌지로 갈린다</a:t>
+              <a:t>•  </a:t>
+            </a:r>
+            <a:r>
+              <a:rPr sz="1700" b="0">
+                <a:solidFill>
+                  <a:srgbClr val="222222"/>
+                </a:solidFill>
+                <a:latin typeface="Consolas"/>
+                <a:cs typeface="Consolas"/>
+              </a:rPr>
+              <a:t>STATUS</a:t>
+            </a:r>
+            <a:r>
+              <a:rPr sz="1700" b="0">
+                <a:solidFill>
+                  <a:srgbClr val="222222"/>
+                </a:solidFill>
+                <a:latin typeface="맑은 고딕"/>
+              </a:rPr>
+              <a:t>가 VALID인지 아닌지로 갈린다</a:t>
             </a:r>
           </a:p>
         </p:txBody>
@@ -11436,7 +12601,25 @@
                 </a:solidFill>
                 <a:latin typeface="맑은 고딕"/>
               </a:rPr>
-              <a:t>•  지연보다 **MRP0 존재**를 먼저 본다</a:t>
+              <a:t>•  지연보다 </a:t>
+            </a:r>
+            <a:r>
+              <a:rPr sz="1700" b="1">
+                <a:solidFill>
+                  <a:srgbClr val="222222"/>
+                </a:solidFill>
+                <a:latin typeface="맑은 고딕"/>
+              </a:rPr>
+              <a:t>MRP0 존재</a:t>
+            </a:r>
+            <a:r>
+              <a:rPr sz="1700" b="0">
+                <a:solidFill>
+                  <a:srgbClr val="222222"/>
+                </a:solidFill>
+                <a:latin typeface="맑은 고딕"/>
+              </a:rPr>
+              <a:t>를 먼저 본다</a:t>
             </a:r>
           </a:p>
           <a:p>
@@ -11452,7 +12635,25 @@
                 </a:solidFill>
                 <a:latin typeface="맑은 고딕"/>
               </a:rPr>
-              <a:t>•  값 하나가 아니라 **추세**를 본다</a:t>
+              <a:t>•  값 하나가 아니라 </a:t>
+            </a:r>
+            <a:r>
+              <a:rPr sz="1700" b="1">
+                <a:solidFill>
+                  <a:srgbClr val="222222"/>
+                </a:solidFill>
+                <a:latin typeface="맑은 고딕"/>
+              </a:rPr>
+              <a:t>추세</a:t>
+            </a:r>
+            <a:r>
+              <a:rPr sz="1700" b="0">
+                <a:solidFill>
+                  <a:srgbClr val="222222"/>
+                </a:solidFill>
+                <a:latin typeface="맑은 고딕"/>
+              </a:rPr>
+              <a:t>를 본다</a:t>
             </a:r>
           </a:p>
         </p:txBody>
@@ -11592,7 +12793,26 @@
                 </a:solidFill>
                 <a:latin typeface="맑은 고딕"/>
               </a:rPr>
-              <a:t>•  Q1. RFS와 MRP0의 `SEQUENCE#`가 같다는 것이 무엇을 뜻하며, 왜 유용한 판별법인가?</a:t>
+              <a:t>•  Q1. RFS와 MRP0의 </a:t>
+            </a:r>
+            <a:r>
+              <a:rPr sz="1600" b="0">
+                <a:solidFill>
+                  <a:srgbClr val="222222"/>
+                </a:solidFill>
+                <a:latin typeface="Consolas"/>
+                <a:cs typeface="Consolas"/>
+              </a:rPr>
+              <a:t>SEQUENCE#</a:t>
+            </a:r>
+            <a:r>
+              <a:rPr sz="1600" b="0">
+                <a:solidFill>
+                  <a:srgbClr val="222222"/>
+                </a:solidFill>
+                <a:latin typeface="맑은 고딕"/>
+              </a:rPr>
+              <a:t>가 같다는 것이 무엇을 뜻하며, 왜 유용한 판별법인가?</a:t>
             </a:r>
           </a:p>
           <a:p>
@@ -11608,7 +12828,26 @@
                 </a:solidFill>
                 <a:latin typeface="맑은 고딕"/>
               </a:rPr>
-              <a:t>•  Q2. Standby 목적지 1번이 `BAD PARAM`인데도 아카이브가 정상 생성된 이유는?</a:t>
+              <a:t>•  Q2. Standby 목적지 1번이 </a:t>
+            </a:r>
+            <a:r>
+              <a:rPr sz="1600" b="0">
+                <a:solidFill>
+                  <a:srgbClr val="222222"/>
+                </a:solidFill>
+                <a:latin typeface="Consolas"/>
+                <a:cs typeface="Consolas"/>
+              </a:rPr>
+              <a:t>BAD PARAM</a:t>
+            </a:r>
+            <a:r>
+              <a:rPr sz="1600" b="0">
+                <a:solidFill>
+                  <a:srgbClr val="222222"/>
+                </a:solidFill>
+                <a:latin typeface="맑은 고딕"/>
+              </a:rPr>
+              <a:t>인데도 아카이브가 정상 생성된 이유는?</a:t>
             </a:r>
           </a:p>
           <a:p>
@@ -11624,7 +12863,45 @@
                 </a:solidFill>
                 <a:latin typeface="맑은 고딕"/>
               </a:rPr>
-              <a:t>•  Q3. `STATUS=BAD PARAM`과 `VALID_NOW=WRONG VALID_TYPE`은 각각 어떻게 대응해야 하는가?</a:t>
+              <a:t>•  Q3. </a:t>
+            </a:r>
+            <a:r>
+              <a:rPr sz="1600" b="0">
+                <a:solidFill>
+                  <a:srgbClr val="222222"/>
+                </a:solidFill>
+                <a:latin typeface="Consolas"/>
+                <a:cs typeface="Consolas"/>
+              </a:rPr>
+              <a:t>STATUS=BAD PARAM</a:t>
+            </a:r>
+            <a:r>
+              <a:rPr sz="1600" b="0">
+                <a:solidFill>
+                  <a:srgbClr val="222222"/>
+                </a:solidFill>
+                <a:latin typeface="맑은 고딕"/>
+              </a:rPr>
+              <a:t>과 </a:t>
+            </a:r>
+            <a:r>
+              <a:rPr sz="1600" b="0">
+                <a:solidFill>
+                  <a:srgbClr val="222222"/>
+                </a:solidFill>
+                <a:latin typeface="Consolas"/>
+                <a:cs typeface="Consolas"/>
+              </a:rPr>
+              <a:t>VALID_NOW=WRONG VALID_TYPE</a:t>
+            </a:r>
+            <a:r>
+              <a:rPr sz="1600" b="0">
+                <a:solidFill>
+                  <a:srgbClr val="222222"/>
+                </a:solidFill>
+                <a:latin typeface="맑은 고딕"/>
+              </a:rPr>
+              <a:t>은 각각 어떻게 대응해야 하는가?</a:t>
             </a:r>
           </a:p>
           <a:p>
@@ -11640,7 +12917,26 @@
                 </a:solidFill>
                 <a:latin typeface="맑은 고딕"/>
               </a:rPr>
-              <a:t>•  Q4. 19c에서 `USING CURRENT LOGFILE`의 실질적 효과는 무엇이며, 그럼에도 명시해야 하는 이유는?</a:t>
+              <a:t>•  Q4. 19c에서 </a:t>
+            </a:r>
+            <a:r>
+              <a:rPr sz="1600" b="0">
+                <a:solidFill>
+                  <a:srgbClr val="222222"/>
+                </a:solidFill>
+                <a:latin typeface="Consolas"/>
+                <a:cs typeface="Consolas"/>
+              </a:rPr>
+              <a:t>USING CURRENT LOGFILE</a:t>
+            </a:r>
+            <a:r>
+              <a:rPr sz="1600" b="0">
+                <a:solidFill>
+                  <a:srgbClr val="222222"/>
+                </a:solidFill>
+                <a:latin typeface="맑은 고딕"/>
+              </a:rPr>
+              <a:t>의 실질적 효과는 무엇이며, 그럼에도 명시해야 하는 이유는?</a:t>
             </a:r>
           </a:p>
           <a:p>
@@ -11812,7 +13108,26 @@
                 </a:solidFill>
                 <a:latin typeface="맑은 고딕"/>
               </a:rPr>
-              <a:t>•  `V$MANAGED_STANDBY` 실측 9행. 진단에 쓰는 것은 RFS와 MRP0 둘이다.</a:t>
+              <a:t>•  </a:t>
+            </a:r>
+            <a:r>
+              <a:rPr sz="1600" b="0">
+                <a:solidFill>
+                  <a:srgbClr val="222222"/>
+                </a:solidFill>
+                <a:latin typeface="Consolas"/>
+                <a:cs typeface="Consolas"/>
+              </a:rPr>
+              <a:t>V$MANAGED_STANDBY</a:t>
+            </a:r>
+            <a:r>
+              <a:rPr sz="1600" b="0">
+                <a:solidFill>
+                  <a:srgbClr val="222222"/>
+                </a:solidFill>
+                <a:latin typeface="맑은 고딕"/>
+              </a:rPr>
+              <a:t> 실측 9행. 진단에 쓰는 것은 RFS와 MRP0 둘이다.</a:t>
             </a:r>
           </a:p>
           <a:p>
@@ -11844,7 +13159,45 @@
                 </a:solidFill>
                 <a:latin typeface="맑은 고딕"/>
               </a:rPr>
-              <a:t>•  RFS와 MRP0의 `SEQUENCE#`·`BLOCK#`이 같으면 실시간 적용의 직접 증거다. MOUNTED에서도 쓸 수 있다.</a:t>
+              <a:t>•  RFS와 MRP0의 </a:t>
+            </a:r>
+            <a:r>
+              <a:rPr sz="1600" b="0">
+                <a:solidFill>
+                  <a:srgbClr val="222222"/>
+                </a:solidFill>
+                <a:latin typeface="Consolas"/>
+                <a:cs typeface="Consolas"/>
+              </a:rPr>
+              <a:t>SEQUENCE#</a:t>
+            </a:r>
+            <a:r>
+              <a:rPr sz="1600" b="0">
+                <a:solidFill>
+                  <a:srgbClr val="222222"/>
+                </a:solidFill>
+                <a:latin typeface="맑은 고딕"/>
+              </a:rPr>
+              <a:t>·</a:t>
+            </a:r>
+            <a:r>
+              <a:rPr sz="1600" b="0">
+                <a:solidFill>
+                  <a:srgbClr val="222222"/>
+                </a:solidFill>
+                <a:latin typeface="Consolas"/>
+                <a:cs typeface="Consolas"/>
+              </a:rPr>
+              <a:t>BLOCK#</a:t>
+            </a:r>
+            <a:r>
+              <a:rPr sz="1600" b="0">
+                <a:solidFill>
+                  <a:srgbClr val="222222"/>
+                </a:solidFill>
+                <a:latin typeface="맑은 고딕"/>
+              </a:rPr>
+              <a:t>이 같으면 실시간 적용의 직접 증거다. MOUNTED에서도 쓸 수 있다.</a:t>
             </a:r>
           </a:p>
           <a:p>
@@ -11860,7 +13213,54 @@
                 </a:solidFill>
                 <a:latin typeface="맑은 고딕"/>
               </a:rPr>
-              <a:t>•  적용을 멈추면 MRP0이 사라지고 `OPEN_MODE`가 `READ ONLY`가 된다. **그런데 두 지연은 0으로 보인다.**</a:t>
+              <a:t>•  적용을 멈추면 MRP0이 사라지고 </a:t>
+            </a:r>
+            <a:r>
+              <a:rPr sz="1600" b="0">
+                <a:solidFill>
+                  <a:srgbClr val="222222"/>
+                </a:solidFill>
+                <a:latin typeface="Consolas"/>
+                <a:cs typeface="Consolas"/>
+              </a:rPr>
+              <a:t>OPEN_MODE</a:t>
+            </a:r>
+            <a:r>
+              <a:rPr sz="1600" b="0">
+                <a:solidFill>
+                  <a:srgbClr val="222222"/>
+                </a:solidFill>
+                <a:latin typeface="맑은 고딕"/>
+              </a:rPr>
+              <a:t>가 </a:t>
+            </a:r>
+            <a:r>
+              <a:rPr sz="1600" b="0">
+                <a:solidFill>
+                  <a:srgbClr val="222222"/>
+                </a:solidFill>
+                <a:latin typeface="Consolas"/>
+                <a:cs typeface="Consolas"/>
+              </a:rPr>
+              <a:t>READ ONLY</a:t>
+            </a:r>
+            <a:r>
+              <a:rPr sz="1600" b="0">
+                <a:solidFill>
+                  <a:srgbClr val="222222"/>
+                </a:solidFill>
+                <a:latin typeface="맑은 고딕"/>
+              </a:rPr>
+              <a:t>가 된다. </a:t>
+            </a:r>
+            <a:r>
+              <a:rPr sz="1600" b="1">
+                <a:solidFill>
+                  <a:srgbClr val="222222"/>
+                </a:solidFill>
+                <a:latin typeface="맑은 고딕"/>
+              </a:rPr>
+              <a:t>그런데 두 지연은 0으로 보인다.</a:t>
             </a:r>
           </a:p>
           <a:p>
@@ -11908,7 +13308,64 @@
                 </a:solidFill>
                 <a:latin typeface="맑은 고딕"/>
               </a:rPr>
-              <a:t>•  Standby의 `LOG_ARCHIVE_DEST_1`이 `db_unique_name=chicago` 상속으로 `BAD PARAM`이었다.</a:t>
+              <a:t>•  Standby의 </a:t>
+            </a:r>
+            <a:r>
+              <a:rPr sz="1600" b="0">
+                <a:solidFill>
+                  <a:srgbClr val="222222"/>
+                </a:solidFill>
+                <a:latin typeface="Consolas"/>
+                <a:cs typeface="Consolas"/>
+              </a:rPr>
+              <a:t>LOG_ARCHIVE_DEST_1</a:t>
+            </a:r>
+            <a:r>
+              <a:rPr sz="1600" b="0">
+                <a:solidFill>
+                  <a:srgbClr val="222222"/>
+                </a:solidFill>
+                <a:latin typeface="맑은 고딕"/>
+              </a:rPr>
+              <a:t>이 </a:t>
+            </a:r>
+            <a:r>
+              <a:rPr sz="1600" b="0">
+                <a:solidFill>
+                  <a:srgbClr val="222222"/>
+                </a:solidFill>
+                <a:latin typeface="Consolas"/>
+                <a:cs typeface="Consolas"/>
+              </a:rPr>
+              <a:t>db_unique_name=chicago</a:t>
+            </a:r>
+            <a:r>
+              <a:rPr sz="1600" b="0">
+                <a:solidFill>
+                  <a:srgbClr val="222222"/>
+                </a:solidFill>
+                <a:latin typeface="맑은 고딕"/>
+              </a:rPr>
+              <a:t> 상속으로 </a:t>
+            </a:r>
+            <a:r>
+              <a:rPr sz="1600" b="0">
+                <a:solidFill>
+                  <a:srgbClr val="222222"/>
+                </a:solidFill>
+                <a:latin typeface="Consolas"/>
+                <a:cs typeface="Consolas"/>
+              </a:rPr>
+              <a:t>BAD PARAM</a:t>
+            </a:r>
+            <a:r>
+              <a:rPr sz="1600" b="0">
+                <a:solidFill>
+                  <a:srgbClr val="222222"/>
+                </a:solidFill>
+                <a:latin typeface="맑은 고딕"/>
+              </a:rPr>
+              <a:t>이었다.</a:t>
             </a:r>
           </a:p>
           <a:p>
@@ -11940,7 +13397,45 @@
                 </a:solidFill>
                 <a:latin typeface="맑은 고딕"/>
               </a:rPr>
-              <a:t>•  고치면 `STATUS`가 VALID가 되고 `RECOVERY_MODE`가 되살아난다. 진단 도구가 고장 나 있던 것이다.</a:t>
+              <a:t>•  고치면 </a:t>
+            </a:r>
+            <a:r>
+              <a:rPr sz="1600" b="0">
+                <a:solidFill>
+                  <a:srgbClr val="222222"/>
+                </a:solidFill>
+                <a:latin typeface="Consolas"/>
+                <a:cs typeface="Consolas"/>
+              </a:rPr>
+              <a:t>STATUS</a:t>
+            </a:r>
+            <a:r>
+              <a:rPr sz="1600" b="0">
+                <a:solidFill>
+                  <a:srgbClr val="222222"/>
+                </a:solidFill>
+                <a:latin typeface="맑은 고딕"/>
+              </a:rPr>
+              <a:t>가 VALID가 되고 </a:t>
+            </a:r>
+            <a:r>
+              <a:rPr sz="1600" b="0">
+                <a:solidFill>
+                  <a:srgbClr val="222222"/>
+                </a:solidFill>
+                <a:latin typeface="Consolas"/>
+                <a:cs typeface="Consolas"/>
+              </a:rPr>
+              <a:t>RECOVERY_MODE</a:t>
+            </a:r>
+            <a:r>
+              <a:rPr sz="1600" b="0">
+                <a:solidFill>
+                  <a:srgbClr val="222222"/>
+                </a:solidFill>
+                <a:latin typeface="맑은 고딕"/>
+              </a:rPr>
+              <a:t>가 되살아난다. 진단 도구가 고장 나 있던 것이다.</a:t>
             </a:r>
           </a:p>
           <a:p>
@@ -11956,7 +13451,45 @@
                 </a:solidFill>
                 <a:latin typeface="맑은 고딕"/>
               </a:rPr>
-              <a:t>•  `LOG_ARCHIVE_DEST_n`은 동적 파라미터라 `SCOPE=BOTH`로 즉시 반영된다.</a:t>
+              <a:t>•  </a:t>
+            </a:r>
+            <a:r>
+              <a:rPr sz="1600" b="0">
+                <a:solidFill>
+                  <a:srgbClr val="222222"/>
+                </a:solidFill>
+                <a:latin typeface="Consolas"/>
+                <a:cs typeface="Consolas"/>
+              </a:rPr>
+              <a:t>LOG_ARCHIVE_DEST_n</a:t>
+            </a:r>
+            <a:r>
+              <a:rPr sz="1600" b="0">
+                <a:solidFill>
+                  <a:srgbClr val="222222"/>
+                </a:solidFill>
+                <a:latin typeface="맑은 고딕"/>
+              </a:rPr>
+              <a:t>은 동적 파라미터라 </a:t>
+            </a:r>
+            <a:r>
+              <a:rPr sz="1600" b="0">
+                <a:solidFill>
+                  <a:srgbClr val="222222"/>
+                </a:solidFill>
+                <a:latin typeface="Consolas"/>
+                <a:cs typeface="Consolas"/>
+              </a:rPr>
+              <a:t>SCOPE=BOTH</a:t>
+            </a:r>
+            <a:r>
+              <a:rPr sz="1600" b="0">
+                <a:solidFill>
+                  <a:srgbClr val="222222"/>
+                </a:solidFill>
+                <a:latin typeface="맑은 고딕"/>
+              </a:rPr>
+              <a:t>로 즉시 반영된다.</a:t>
             </a:r>
           </a:p>
           <a:p>
@@ -11972,7 +13505,26 @@
                 </a:solidFill>
                 <a:latin typeface="맑은 고딕"/>
               </a:rPr>
-              <a:t>•  `WRONG VALID_TYPE`은 정상이다. 역할 전환용 목적지가 지금은 유효하지 않다는 뜻이다.</a:t>
+              <a:t>•  </a:t>
+            </a:r>
+            <a:r>
+              <a:rPr sz="1600" b="0">
+                <a:solidFill>
+                  <a:srgbClr val="222222"/>
+                </a:solidFill>
+                <a:latin typeface="Consolas"/>
+                <a:cs typeface="Consolas"/>
+              </a:rPr>
+              <a:t>WRONG VALID_TYPE</a:t>
+            </a:r>
+            <a:r>
+              <a:rPr sz="1600" b="0">
+                <a:solidFill>
+                  <a:srgbClr val="222222"/>
+                </a:solidFill>
+                <a:latin typeface="맑은 고딕"/>
+              </a:rPr>
+              <a:t>은 정상이다. 역할 전환용 목적지가 지금은 유효하지 않다는 뜻이다.</a:t>
             </a:r>
           </a:p>
           <a:p>
@@ -11988,7 +13540,83 @@
                 </a:solidFill>
                 <a:latin typeface="맑은 고딕"/>
               </a:rPr>
-              <a:t>•  상속 사례가 넷 — `CONTROL_FILES`·`LOG_ARCHIVE_DEST_1`·`FAL_CLIENT`, 그리고 막아 낸 `DB_NAME`.</a:t>
+              <a:t>•  상속 사례가 넷 — </a:t>
+            </a:r>
+            <a:r>
+              <a:rPr sz="1600" b="0">
+                <a:solidFill>
+                  <a:srgbClr val="222222"/>
+                </a:solidFill>
+                <a:latin typeface="Consolas"/>
+                <a:cs typeface="Consolas"/>
+              </a:rPr>
+              <a:t>CONTROL_FILES</a:t>
+            </a:r>
+            <a:r>
+              <a:rPr sz="1600" b="0">
+                <a:solidFill>
+                  <a:srgbClr val="222222"/>
+                </a:solidFill>
+                <a:latin typeface="맑은 고딕"/>
+              </a:rPr>
+              <a:t>·</a:t>
+            </a:r>
+            <a:r>
+              <a:rPr sz="1600" b="0">
+                <a:solidFill>
+                  <a:srgbClr val="222222"/>
+                </a:solidFill>
+                <a:latin typeface="Consolas"/>
+                <a:cs typeface="Consolas"/>
+              </a:rPr>
+              <a:t>LOG_ARCHIVE_DEST_1</a:t>
+            </a:r>
+            <a:r>
+              <a:rPr sz="1600" b="0">
+                <a:solidFill>
+                  <a:srgbClr val="222222"/>
+                </a:solidFill>
+                <a:latin typeface="맑은 고딕"/>
+              </a:rPr>
+              <a:t>·</a:t>
+            </a:r>
+            <a:r>
+              <a:rPr sz="1600" b="0">
+                <a:solidFill>
+                  <a:srgbClr val="222222"/>
+                </a:solidFill>
+                <a:latin typeface="Consolas"/>
+                <a:cs typeface="Consolas"/>
+              </a:rPr>
+              <a:t>FAL_CLIENT</a:t>
+            </a:r>
+            <a:r>
+              <a:rPr sz="1600" b="0">
+                <a:solidFill>
+                  <a:srgbClr val="222222"/>
+                </a:solidFill>
+                <a:latin typeface="맑은 고딕"/>
+              </a:rPr>
+              <a:t>, 그리고 막아 낸 </a:t>
+            </a:r>
+            <a:r>
+              <a:rPr sz="1600" b="0">
+                <a:solidFill>
+                  <a:srgbClr val="222222"/>
+                </a:solidFill>
+                <a:latin typeface="Consolas"/>
+                <a:cs typeface="Consolas"/>
+              </a:rPr>
+              <a:t>DB_NAME</a:t>
+            </a:r>
+            <a:r>
+              <a:rPr sz="1600" b="0">
+                <a:solidFill>
+                  <a:srgbClr val="222222"/>
+                </a:solidFill>
+                <a:latin typeface="맑은 고딕"/>
+              </a:rPr>
+              <a:t>.</a:t>
             </a:r>
           </a:p>
           <a:p>
@@ -12004,7 +13632,26 @@
                 </a:solidFill>
                 <a:latin typeface="맑은 고딕"/>
               </a:rPr>
-              <a:t>•  19c에서는 SRL이 있으면 `USING CURRENT LOGFILE` 없이도 실시간 적용이다. 그럼에도 명시하는 편이 낫다.</a:t>
+              <a:t>•  19c에서는 SRL이 있으면 </a:t>
+            </a:r>
+            <a:r>
+              <a:rPr sz="1600" b="0">
+                <a:solidFill>
+                  <a:srgbClr val="222222"/>
+                </a:solidFill>
+                <a:latin typeface="Consolas"/>
+                <a:cs typeface="Consolas"/>
+              </a:rPr>
+              <a:t>USING CURRENT LOGFILE</a:t>
+            </a:r>
+            <a:r>
+              <a:rPr sz="1600" b="0">
+                <a:solidFill>
+                  <a:srgbClr val="222222"/>
+                </a:solidFill>
+                <a:latin typeface="맑은 고딕"/>
+              </a:rPr>
+              <a:t> 없이도 실시간 적용이다. 그럼에도 명시하는 편이 낫다.</a:t>
             </a:r>
           </a:p>
           <a:p>
@@ -12020,7 +13667,26 @@
                 </a:solidFill>
                 <a:latin typeface="맑은 고딕"/>
               </a:rPr>
-              <a:t>•  `V$ARCHIVE_GAP`은 빠진 파일을 보여 준다. 실측 갭 2개, 밀린 것 5개로 서로 다르다.</a:t>
+              <a:t>•  </a:t>
+            </a:r>
+            <a:r>
+              <a:rPr sz="1600" b="0">
+                <a:solidFill>
+                  <a:srgbClr val="222222"/>
+                </a:solidFill>
+                <a:latin typeface="Consolas"/>
+                <a:cs typeface="Consolas"/>
+              </a:rPr>
+              <a:t>V$ARCHIVE_GAP</a:t>
+            </a:r>
+            <a:r>
+              <a:rPr sz="1600" b="0">
+                <a:solidFill>
+                  <a:srgbClr val="222222"/>
+                </a:solidFill>
+                <a:latin typeface="맑은 고딕"/>
+              </a:rPr>
+              <a:t>은 빠진 파일을 보여 준다. 실측 갭 2개, 밀린 것 5개로 서로 다르다.</a:t>
             </a:r>
           </a:p>
           <a:p>
@@ -12052,7 +13718,45 @@
                 </a:solidFill>
                 <a:latin typeface="맑은 고딕"/>
               </a:rPr>
-              <a:t>•  `TIME_COMPUTED`와 `DATUM_TIME`이 12초 차이 났다. 지연 값 자체가 십수 초 전 정보다.</a:t>
+              <a:t>•  </a:t>
+            </a:r>
+            <a:r>
+              <a:rPr sz="1600" b="0">
+                <a:solidFill>
+                  <a:srgbClr val="222222"/>
+                </a:solidFill>
+                <a:latin typeface="Consolas"/>
+                <a:cs typeface="Consolas"/>
+              </a:rPr>
+              <a:t>TIME_COMPUTED</a:t>
+            </a:r>
+            <a:r>
+              <a:rPr sz="1600" b="0">
+                <a:solidFill>
+                  <a:srgbClr val="222222"/>
+                </a:solidFill>
+                <a:latin typeface="맑은 고딕"/>
+              </a:rPr>
+              <a:t>와 </a:t>
+            </a:r>
+            <a:r>
+              <a:rPr sz="1600" b="0">
+                <a:solidFill>
+                  <a:srgbClr val="222222"/>
+                </a:solidFill>
+                <a:latin typeface="Consolas"/>
+                <a:cs typeface="Consolas"/>
+              </a:rPr>
+              <a:t>DATUM_TIME</a:t>
+            </a:r>
+            <a:r>
+              <a:rPr sz="1600" b="0">
+                <a:solidFill>
+                  <a:srgbClr val="222222"/>
+                </a:solidFill>
+                <a:latin typeface="맑은 고딕"/>
+              </a:rPr>
+              <a:t>이 12초 차이 났다. 지연 값 자체가 십수 초 전 정보다.</a:t>
             </a:r>
           </a:p>
           <a:p>
@@ -12256,7 +13960,26 @@
                 </a:solidFill>
                 <a:latin typeface="맑은 고딕"/>
               </a:rPr>
-              <a:t>•  실습 03 — BAD PARAM 진단과 교정: 상속된 두 파라미터를 고치고 `RECOVERY_MODE` 변화를 확인한다.</a:t>
+              <a:t>•  실습 03 — BAD PARAM 진단과 교정: 상속된 두 파라미터를 고치고 </a:t>
+            </a:r>
+            <a:r>
+              <a:rPr sz="1600" b="0">
+                <a:solidFill>
+                  <a:srgbClr val="222222"/>
+                </a:solidFill>
+                <a:latin typeface="Consolas"/>
+                <a:cs typeface="Consolas"/>
+              </a:rPr>
+              <a:t>RECOVERY_MODE</a:t>
+            </a:r>
+            <a:r>
+              <a:rPr sz="1600" b="0">
+                <a:solidFill>
+                  <a:srgbClr val="222222"/>
+                </a:solidFill>
+                <a:latin typeface="맑은 고딕"/>
+              </a:rPr>
+              <a:t> 변화를 확인한다.</a:t>
             </a:r>
           </a:p>
           <a:p>
@@ -12288,7 +14011,26 @@
                 </a:solidFill>
                 <a:latin typeface="맑은 고딕"/>
               </a:rPr>
-              <a:t>•  실습 05 — 갭 만들기와 해소: `V$ARCHIVE_GAP`을 관찰하고 따라잡는 과정을 추적한다.</a:t>
+              <a:t>•  실습 05 — 갭 만들기와 해소: </a:t>
+            </a:r>
+            <a:r>
+              <a:rPr sz="1600" b="0">
+                <a:solidFill>
+                  <a:srgbClr val="222222"/>
+                </a:solidFill>
+                <a:latin typeface="Consolas"/>
+                <a:cs typeface="Consolas"/>
+              </a:rPr>
+              <a:t>V$ARCHIVE_GAP</a:t>
+            </a:r>
+            <a:r>
+              <a:rPr sz="1600" b="0">
+                <a:solidFill>
+                  <a:srgbClr val="222222"/>
+                </a:solidFill>
+                <a:latin typeface="맑은 고딕"/>
+              </a:rPr>
+              <a:t>을 관찰하고 따라잡는 과정을 추적한다.</a:t>
             </a:r>
           </a:p>
           <a:p>
@@ -12770,7 +14512,26 @@
                 </a:solidFill>
                 <a:latin typeface="맑은 고딕"/>
               </a:rPr>
-              <a:t>•  5·6장은 `READ ONLY WITH APPLY` 확인으로 끝났다</a:t>
+              <a:t>•  5·6장은 </a:t>
+            </a:r>
+            <a:r>
+              <a:rPr sz="1700" b="0">
+                <a:solidFill>
+                  <a:srgbClr val="222222"/>
+                </a:solidFill>
+                <a:latin typeface="Consolas"/>
+                <a:cs typeface="Consolas"/>
+              </a:rPr>
+              <a:t>READ ONLY WITH APPLY</a:t>
+            </a:r>
+            <a:r>
+              <a:rPr sz="1700" b="0">
+                <a:solidFill>
+                  <a:srgbClr val="222222"/>
+                </a:solidFill>
+                <a:latin typeface="맑은 고딕"/>
+              </a:rPr>
+              <a:t> 확인으로 끝났다</a:t>
             </a:r>
           </a:p>
           <a:p>
@@ -12997,7 +14758,26 @@
                 </a:solidFill>
                 <a:latin typeface="맑은 고딕"/>
               </a:rPr>
-              <a:t>•  `RFS` — Primary의 리두를 받아 SRL에 쓴다. 개수 유동적</a:t>
+              <a:t>•  </a:t>
+            </a:r>
+            <a:r>
+              <a:rPr sz="1700" b="0">
+                <a:solidFill>
+                  <a:srgbClr val="222222"/>
+                </a:solidFill>
+                <a:latin typeface="Consolas"/>
+                <a:cs typeface="Consolas"/>
+              </a:rPr>
+              <a:t>RFS</a:t>
+            </a:r>
+            <a:r>
+              <a:rPr sz="1700" b="0">
+                <a:solidFill>
+                  <a:srgbClr val="222222"/>
+                </a:solidFill>
+                <a:latin typeface="맑은 고딕"/>
+              </a:rPr>
+              <a:t> — Primary의 리두를 받아 SRL에 쓴다. 개수 유동적</a:t>
             </a:r>
           </a:p>
           <a:p>
@@ -13013,7 +14793,35 @@
                 </a:solidFill>
                 <a:latin typeface="맑은 고딕"/>
               </a:rPr>
-              <a:t>•  `MRP0` — SRL을 읽어 데이터 파일에 적용한다. **항상 하나**</a:t>
+              <a:t>•  </a:t>
+            </a:r>
+            <a:r>
+              <a:rPr sz="1700" b="0">
+                <a:solidFill>
+                  <a:srgbClr val="222222"/>
+                </a:solidFill>
+                <a:latin typeface="Consolas"/>
+                <a:cs typeface="Consolas"/>
+              </a:rPr>
+              <a:t>MRP0</a:t>
+            </a:r>
+            <a:r>
+              <a:rPr sz="1700" b="0">
+                <a:solidFill>
+                  <a:srgbClr val="222222"/>
+                </a:solidFill>
+                <a:latin typeface="맑은 고딕"/>
+              </a:rPr>
+              <a:t> — SRL을 읽어 데이터 파일에 적용한다. </a:t>
+            </a:r>
+            <a:r>
+              <a:rPr sz="1700" b="1">
+                <a:solidFill>
+                  <a:srgbClr val="222222"/>
+                </a:solidFill>
+                <a:latin typeface="맑은 고딕"/>
+              </a:rPr>
+              <a:t>항상 하나</a:t>
             </a:r>
           </a:p>
           <a:p>
@@ -13029,7 +14837,45 @@
                 </a:solidFill>
                 <a:latin typeface="맑은 고딕"/>
               </a:rPr>
-              <a:t>•  `ARCH` — 아카이브 담당. 실측 4개 (`LOG_ARCHIVE_MAX_PROCESSES=4`)</a:t>
+              <a:t>•  </a:t>
+            </a:r>
+            <a:r>
+              <a:rPr sz="1700" b="0">
+                <a:solidFill>
+                  <a:srgbClr val="222222"/>
+                </a:solidFill>
+                <a:latin typeface="Consolas"/>
+                <a:cs typeface="Consolas"/>
+              </a:rPr>
+              <a:t>ARCH</a:t>
+            </a:r>
+            <a:r>
+              <a:rPr sz="1700" b="0">
+                <a:solidFill>
+                  <a:srgbClr val="222222"/>
+                </a:solidFill>
+                <a:latin typeface="맑은 고딕"/>
+              </a:rPr>
+              <a:t> — 아카이브 담당. 실측 4개 (</a:t>
+            </a:r>
+            <a:r>
+              <a:rPr sz="1700" b="0">
+                <a:solidFill>
+                  <a:srgbClr val="222222"/>
+                </a:solidFill>
+                <a:latin typeface="Consolas"/>
+                <a:cs typeface="Consolas"/>
+              </a:rPr>
+              <a:t>LOG_ARCHIVE_MAX_PROCESSES=4</a:t>
+            </a:r>
+            <a:r>
+              <a:rPr sz="1700" b="0">
+                <a:solidFill>
+                  <a:srgbClr val="222222"/>
+                </a:solidFill>
+                <a:latin typeface="맑은 고딕"/>
+              </a:rPr>
+              <a:t>)</a:t>
             </a:r>
           </a:p>
           <a:p>
@@ -13045,7 +14891,26 @@
                 </a:solidFill>
                 <a:latin typeface="맑은 고딕"/>
               </a:rPr>
-              <a:t>•  `DGRD` — 관리용 보조. 실측 2개</a:t>
+              <a:t>•  </a:t>
+            </a:r>
+            <a:r>
+              <a:rPr sz="1700" b="0">
+                <a:solidFill>
+                  <a:srgbClr val="222222"/>
+                </a:solidFill>
+                <a:latin typeface="Consolas"/>
+                <a:cs typeface="Consolas"/>
+              </a:rPr>
+              <a:t>DGRD</a:t>
+            </a:r>
+            <a:r>
+              <a:rPr sz="1700" b="0">
+                <a:solidFill>
+                  <a:srgbClr val="222222"/>
+                </a:solidFill>
+                <a:latin typeface="맑은 고딕"/>
+              </a:rPr>
+              <a:t> — 관리용 보조. 실측 2개</a:t>
             </a:r>
           </a:p>
         </p:txBody>
@@ -13256,7 +15121,16 @@
                 </a:solidFill>
                 <a:latin typeface="맑은 고딕"/>
               </a:rPr>
-              <a:t>•  **받는 지점과 적용하는 지점이 같다**</a:t>
+              <a:t>•  </a:t>
+            </a:r>
+            <a:r>
+              <a:rPr sz="1700" b="1">
+                <a:solidFill>
+                  <a:srgbClr val="222222"/>
+                </a:solidFill>
+                <a:latin typeface="맑은 고딕"/>
+              </a:rPr>
+              <a:t>받는 지점과 적용하는 지점이 같다</a:t>
             </a:r>
           </a:p>
           <a:p>
@@ -13451,7 +15325,26 @@
                 </a:solidFill>
                 <a:latin typeface="맑은 고딕"/>
               </a:rPr>
-              <a:t>•  적용 중지 → `V$MANAGED_STANDBY`에서 MRP0이 없어진다</a:t>
+              <a:t>•  적용 중지 → </a:t>
+            </a:r>
+            <a:r>
+              <a:rPr sz="1700" b="0">
+                <a:solidFill>
+                  <a:srgbClr val="222222"/>
+                </a:solidFill>
+                <a:latin typeface="Consolas"/>
+                <a:cs typeface="Consolas"/>
+              </a:rPr>
+              <a:t>V$MANAGED_STANDBY</a:t>
+            </a:r>
+            <a:r>
+              <a:rPr sz="1700" b="0">
+                <a:solidFill>
+                  <a:srgbClr val="222222"/>
+                </a:solidFill>
+                <a:latin typeface="맑은 고딕"/>
+              </a:rPr>
+              <a:t>에서 MRP0이 없어진다</a:t>
             </a:r>
           </a:p>
           <a:p>
@@ -13467,7 +15360,35 @@
                 </a:solidFill>
                 <a:latin typeface="맑은 고딕"/>
               </a:rPr>
-              <a:t>•  `OPEN_MODE` : READ ONLY WITH APPLY → **READ ONLY**</a:t>
+              <a:t>•  </a:t>
+            </a:r>
+            <a:r>
+              <a:rPr sz="1700" b="0">
+                <a:solidFill>
+                  <a:srgbClr val="222222"/>
+                </a:solidFill>
+                <a:latin typeface="Consolas"/>
+                <a:cs typeface="Consolas"/>
+              </a:rPr>
+              <a:t>OPEN_MODE</a:t>
+            </a:r>
+            <a:r>
+              <a:rPr sz="1700" b="0">
+                <a:solidFill>
+                  <a:srgbClr val="222222"/>
+                </a:solidFill>
+                <a:latin typeface="맑은 고딕"/>
+              </a:rPr>
+              <a:t> : READ ONLY WITH APPLY → </a:t>
+            </a:r>
+            <a:r>
+              <a:rPr sz="1700" b="1">
+                <a:solidFill>
+                  <a:srgbClr val="222222"/>
+                </a:solidFill>
+                <a:latin typeface="맑은 고딕"/>
+              </a:rPr>
+              <a:t>READ ONLY</a:t>
             </a:r>
           </a:p>
           <a:p>
@@ -13483,7 +15404,16 @@
                 </a:solidFill>
                 <a:latin typeface="맑은 고딕"/>
               </a:rPr>
-              <a:t>•  그런데 두 지연은 **0으로 보인다**</a:t>
+              <a:t>•  그런데 두 지연은 </a:t>
+            </a:r>
+            <a:r>
+              <a:rPr sz="1700" b="1">
+                <a:solidFill>
+                  <a:srgbClr val="222222"/>
+                </a:solidFill>
+                <a:latin typeface="맑은 고딕"/>
+              </a:rPr>
+              <a:t>0으로 보인다</a:t>
             </a:r>
           </a:p>
           <a:p>
